--- a/group2_intro/week2/slides/W2_group2.pptx
+++ b/group2_intro/week2/slides/W2_group2.pptx
@@ -3174,7 +3174,7 @@
                 </a:solidFill>
                 <a:latin typeface="Pretendard ExtraBold"/>
               </a:rPr>
-              <a:t>Week 2 · 2조 Intro</a:t>
+              <a:t>Week 2  ·  2조</a:t>
             </a:r>
           </a:p>
         </p:txBody>
@@ -3213,7 +3213,7 @@
                 </a:solidFill>
                 <a:latin typeface="Pretendard Black"/>
               </a:rPr>
-              <a:t>Deep Learning 입문 — mini UNet</a:t>
+              <a:t>Deep Learning 입문 — UNet · pix2pix</a:t>
             </a:r>
           </a:p>
         </p:txBody>
@@ -3252,7 +3252,7 @@
                 </a:solidFill>
                 <a:latin typeface="Pretendard SemiBold"/>
               </a:rPr>
-              <a:t>UNet 구조 · SliceDataset · 학습 · baseline 능가</a:t>
+              <a:t>슬라이스 보간을 학습 가능한 함수로 정식화</a:t>
             </a:r>
           </a:p>
         </p:txBody>
@@ -3348,7 +3348,7 @@
                 </a:solidFill>
                 <a:latin typeface="Pretendard Black"/>
               </a:rPr>
-              <a:t>탐구 과제 (handout 4번 참고)</a:t>
+              <a:t>본 연구 모델의 예측 범위</a:t>
             </a:r>
           </a:p>
         </p:txBody>
@@ -3430,7 +3430,7 @@
                 </a:solidFill>
                 <a:latin typeface="Pretendard Medium"/>
               </a:rPr>
-              <a:t>W2 — DL 입문 · 2조 Intro</a:t>
+              <a:t>W2 · DL 입문 · 2조</a:t>
             </a:r>
           </a:p>
         </p:txBody>
@@ -3482,8 +3482,8 @@
         </p:nvSpPr>
         <p:spPr>
           <a:xfrm>
-            <a:off x="731520" y="1371600"/>
-            <a:ext cx="10972800" cy="3200400"/>
+            <a:off x="640080" y="1463040"/>
+            <a:ext cx="11155680" cy="4572000"/>
           </a:xfrm>
           <a:prstGeom prst="rect">
             <a:avLst/>
@@ -3505,7 +3505,7 @@
               </a:spcAft>
             </a:pPr>
             <a:r>
-              <a:rPr sz="1800" b="0">
+              <a:rPr sz="1700" b="0">
                 <a:solidFill>
                   <a:srgbClr val="EA851B"/>
                 </a:solidFill>
@@ -3514,13 +3514,13 @@
               <a:t>•  </a:t>
             </a:r>
             <a:r>
-              <a:rPr sz="1800" b="0">
+              <a:rPr sz="1700" b="0">
                 <a:solidFill>
                   <a:srgbClr val="181818"/>
                 </a:solidFill>
                 <a:latin typeface="Pretendard SemiBold"/>
               </a:rPr>
-              <a:t>필수1: fast/standard 결과 표</a:t>
+              <a:t>본 연구 모델: 한 번의 예측마다 가운데 슬라이스 1장 출력</a:t>
             </a:r>
           </a:p>
           <a:p>
@@ -3533,7 +3533,7 @@
               </a:spcAft>
             </a:pPr>
             <a:r>
-              <a:rPr sz="1800" b="0">
+              <a:rPr sz="1700" b="0">
                 <a:solidFill>
                   <a:srgbClr val="EA851B"/>
                 </a:solidFill>
@@ -3542,13 +3542,13 @@
               <a:t>•  </a:t>
             </a:r>
             <a:r>
-              <a:rPr sz="1800" b="0">
+              <a:rPr sz="1700" b="0">
                 <a:solidFill>
                   <a:srgbClr val="181818"/>
                 </a:solidFill>
                 <a:latin typeface="Pretendard SemiBold"/>
               </a:rPr>
-              <a:t>필수2: 3 도메인 cross-domain 표</a:t>
+              <a:t>입력 = 예측 위치 기준 6개 측정 슬라이스 (z±3, z±9, z±15)</a:t>
             </a:r>
           </a:p>
           <a:p>
@@ -3561,7 +3561,7 @@
               </a:spcAft>
             </a:pPr>
             <a:r>
-              <a:rPr sz="1800" b="0">
+              <a:rPr sz="1700" b="0">
                 <a:solidFill>
                   <a:srgbClr val="EA851B"/>
                 </a:solidFill>
@@ -3570,13 +3570,13 @@
               <a:t>•  </a:t>
             </a:r>
             <a:r>
-              <a:rPr sz="1800" b="0">
+              <a:rPr sz="1700" b="0">
                 <a:solidFill>
                   <a:srgbClr val="181818"/>
                 </a:solidFill>
                 <a:latin typeface="Pretendard SemiBold"/>
               </a:rPr>
-              <a:t>선택3: K=3, 5, 7 평가 비교</a:t>
+              <a:t>학습 시나리오: k=2 정규 측정 (짝수 측정 / 홀수 예측)</a:t>
             </a:r>
           </a:p>
           <a:p>
@@ -3589,7 +3589,7 @@
               </a:spcAft>
             </a:pPr>
             <a:r>
-              <a:rPr sz="1800" b="0">
+              <a:rPr sz="1700" b="0">
                 <a:solidFill>
                   <a:srgbClr val="EA851B"/>
                 </a:solidFill>
@@ -3598,13 +3598,41 @@
               <a:t>•  </a:t>
             </a:r>
             <a:r>
-              <a:rPr sz="1800" b="0">
+              <a:rPr sz="1700" b="0">
                 <a:solidFill>
                   <a:srgbClr val="181818"/>
                 </a:solidFill>
                 <a:latin typeface="Pretendard SemiBold"/>
               </a:rPr>
-              <a:t>선택4: lr 변경 실험</a:t>
+              <a:t>z=4·7 측정 상태에서 z=5·6을 모두 복원하려면 모델을 두 번 호출</a:t>
+            </a:r>
+          </a:p>
+          <a:p>
+            <a:pPr>
+              <a:lnSpc>
+                <a:spcPct val="130000"/>
+              </a:lnSpc>
+              <a:spcAft>
+                <a:spcPts val="600"/>
+              </a:spcAft>
+            </a:pPr>
+            <a:r>
+              <a:rPr sz="1700" b="0">
+                <a:solidFill>
+                  <a:srgbClr val="EA851B"/>
+                </a:solidFill>
+                <a:latin typeface="Pretendard ExtraBold"/>
+              </a:rPr>
+              <a:t>•  </a:t>
+            </a:r>
+            <a:r>
+              <a:rPr sz="1700" b="0">
+                <a:solidFill>
+                  <a:srgbClr val="181818"/>
+                </a:solidFill>
+                <a:latin typeface="Pretendard SemiBold"/>
+              </a:rPr>
+              <a:t>학습 분포 밖의 불규칙 측정 패턴은 정확도가 떨어질 수 있음 — W6에서 다룸</a:t>
             </a:r>
           </a:p>
         </p:txBody>
@@ -3661,7 +3689,7 @@
                 </a:solidFill>
                 <a:latin typeface="Pretendard Black"/>
               </a:rPr>
-              <a:t>자기 점검 &amp; W3 예고</a:t>
+              <a:t>다음 주차 예고 — W3</a:t>
             </a:r>
           </a:p>
         </p:txBody>
@@ -3743,7 +3771,7 @@
                 </a:solidFill>
                 <a:latin typeface="Pretendard Medium"/>
               </a:rPr>
-              <a:t>W2 — DL 입문 · 2조 Intro</a:t>
+              <a:t>W2 · DL 입문 · 2조</a:t>
             </a:r>
           </a:p>
         </p:txBody>
@@ -3795,8 +3823,8 @@
         </p:nvSpPr>
         <p:spPr>
           <a:xfrm>
-            <a:off x="548640" y="1280160"/>
-            <a:ext cx="6400800" cy="457200"/>
+            <a:off x="731520" y="1463040"/>
+            <a:ext cx="10972800" cy="548640"/>
           </a:xfrm>
           <a:prstGeom prst="rect">
             <a:avLst/>
@@ -3815,13 +3843,13 @@
               </a:lnSpc>
             </a:pPr>
             <a:r>
-              <a:rPr sz="2000" b="0">
+              <a:rPr sz="2400" b="0">
                 <a:solidFill>
                   <a:srgbClr val="EA851B"/>
                 </a:solidFill>
                 <a:latin typeface="Pretendard ExtraBold"/>
               </a:rPr>
-              <a:t>자기 점검 5문항</a:t>
+              <a:t>적대적 학습 — pix2pix GAN</a:t>
             </a:r>
           </a:p>
         </p:txBody>
@@ -3834,8 +3862,8 @@
         </p:nvSpPr>
         <p:spPr>
           <a:xfrm>
-            <a:off x="548640" y="1828800"/>
-            <a:ext cx="6400800" cy="3657600"/>
+            <a:off x="731520" y="2194560"/>
+            <a:ext cx="10972800" cy="2743200"/>
           </a:xfrm>
           <a:prstGeom prst="rect">
             <a:avLst/>
@@ -3857,7 +3885,7 @@
               </a:spcAft>
             </a:pPr>
             <a:r>
-              <a:rPr sz="1500" b="0">
+              <a:rPr sz="1800" b="0">
                 <a:solidFill>
                   <a:srgbClr val="EA851B"/>
                 </a:solidFill>
@@ -3866,13 +3894,13 @@
               <a:t>•  </a:t>
             </a:r>
             <a:r>
-              <a:rPr sz="1500" b="0">
+              <a:rPr sz="1800" b="0">
                 <a:solidFill>
                   <a:srgbClr val="181818"/>
                 </a:solidFill>
                 <a:latin typeface="Pretendard SemiBold"/>
               </a:rPr>
-              <a:t>Skip-connection 의 역할</a:t>
+              <a:t>L1 손실만으로는 흐릿한 복원이 한계</a:t>
             </a:r>
           </a:p>
           <a:p>
@@ -3885,7 +3913,7 @@
               </a:spcAft>
             </a:pPr>
             <a:r>
-              <a:rPr sz="1500" b="0">
+              <a:rPr sz="1800" b="0">
                 <a:solidFill>
                   <a:srgbClr val="EA851B"/>
                 </a:solidFill>
@@ -3894,13 +3922,13 @@
               <a:t>•  </a:t>
             </a:r>
             <a:r>
-              <a:rPr sz="1500" b="0">
+              <a:rPr sz="1800" b="0">
                 <a:solidFill>
                   <a:srgbClr val="181818"/>
                 </a:solidFill>
                 <a:latin typeface="Pretendard SemiBold"/>
               </a:rPr>
-              <a:t>patch_size 효과</a:t>
+              <a:t>pix2pix + patch discriminator → 조건부 GAN 학습</a:t>
             </a:r>
           </a:p>
           <a:p>
@@ -3913,7 +3941,7 @@
               </a:spcAft>
             </a:pPr>
             <a:r>
-              <a:rPr sz="1500" b="0">
+              <a:rPr sz="1800" b="0">
                 <a:solidFill>
                   <a:srgbClr val="EA851B"/>
                 </a:solidFill>
@@ -3922,243 +3950,13 @@
               <a:t>•  </a:t>
             </a:r>
             <a:r>
-              <a:rPr sz="1500" b="0">
+              <a:rPr sz="1800" b="0">
                 <a:solidFill>
                   <a:srgbClr val="181818"/>
                 </a:solidFill>
                 <a:latin typeface="Pretendard SemiBold"/>
               </a:rPr>
-              <a:t>본인 모델 |Δφ| vs baseline</a:t>
-            </a:r>
-          </a:p>
-          <a:p>
-            <a:pPr>
-              <a:lnSpc>
-                <a:spcPct val="130000"/>
-              </a:lnSpc>
-              <a:spcAft>
-                <a:spcPts val="600"/>
-              </a:spcAft>
-            </a:pPr>
-            <a:r>
-              <a:rPr sz="1500" b="0">
-                <a:solidFill>
-                  <a:srgbClr val="EA851B"/>
-                </a:solidFill>
-                <a:latin typeface="Pretendard ExtraBold"/>
-              </a:rPr>
-              <a:t>•  </a:t>
-            </a:r>
-            <a:r>
-              <a:rPr sz="1500" b="0">
-                <a:solidFill>
-                  <a:srgbClr val="181818"/>
-                </a:solidFill>
-                <a:latin typeface="Pretendard SemiBold"/>
-              </a:rPr>
-              <a:t>학습 곡선 모양</a:t>
-            </a:r>
-          </a:p>
-          <a:p>
-            <a:pPr>
-              <a:lnSpc>
-                <a:spcPct val="130000"/>
-              </a:lnSpc>
-              <a:spcAft>
-                <a:spcPts val="600"/>
-              </a:spcAft>
-            </a:pPr>
-            <a:r>
-              <a:rPr sz="1500" b="0">
-                <a:solidFill>
-                  <a:srgbClr val="EA851B"/>
-                </a:solidFill>
-                <a:latin typeface="Pretendard ExtraBold"/>
-              </a:rPr>
-              <a:t>•  </a:t>
-            </a:r>
-            <a:r>
-              <a:rPr sz="1500" b="0">
-                <a:solidFill>
-                  <a:srgbClr val="181818"/>
-                </a:solidFill>
-                <a:latin typeface="Pretendard SemiBold"/>
-              </a:rPr>
-              <a:t>cross-domain 결과 해석</a:t>
-            </a:r>
-          </a:p>
-        </p:txBody>
-      </p:sp>
-      <p:sp>
-        <p:nvSpPr>
-          <p:cNvPr id="8" name="TextBox 7"/>
-          <p:cNvSpPr txBox="1"/>
-          <p:nvPr/>
-        </p:nvSpPr>
-        <p:spPr>
-          <a:xfrm>
-            <a:off x="7132320" y="1280160"/>
-            <a:ext cx="5029200" cy="457200"/>
-          </a:xfrm>
-          <a:prstGeom prst="rect">
-            <a:avLst/>
-          </a:prstGeom>
-          <a:noFill/>
-        </p:spPr>
-        <p:txBody>
-          <a:bodyPr wrap="square" lIns="45720" rIns="45720">
-            <a:spAutoFit/>
-          </a:bodyPr>
-          <a:lstStyle/>
-          <a:p>
-            <a:pPr algn="l">
-              <a:lnSpc>
-                <a:spcPct val="115000"/>
-              </a:lnSpc>
-            </a:pPr>
-            <a:r>
-              <a:rPr sz="2000" b="0">
-                <a:solidFill>
-                  <a:srgbClr val="EA851B"/>
-                </a:solidFill>
-                <a:latin typeface="Pretendard ExtraBold"/>
-              </a:rPr>
-              <a:t>W3 — 손실 함수 + HPO</a:t>
-            </a:r>
-          </a:p>
-        </p:txBody>
-      </p:sp>
-      <p:sp>
-        <p:nvSpPr>
-          <p:cNvPr id="9" name="TextBox 8"/>
-          <p:cNvSpPr txBox="1"/>
-          <p:nvPr/>
-        </p:nvSpPr>
-        <p:spPr>
-          <a:xfrm>
-            <a:off x="7132320" y="1828800"/>
-            <a:ext cx="5029200" cy="3657600"/>
-          </a:xfrm>
-          <a:prstGeom prst="rect">
-            <a:avLst/>
-          </a:prstGeom>
-          <a:noFill/>
-        </p:spPr>
-        <p:txBody>
-          <a:bodyPr wrap="square">
-            <a:spAutoFit/>
-          </a:bodyPr>
-          <a:lstStyle/>
-          <a:p>
-            <a:pPr>
-              <a:lnSpc>
-                <a:spcPct val="130000"/>
-              </a:lnSpc>
-              <a:spcAft>
-                <a:spcPts val="600"/>
-              </a:spcAft>
-            </a:pPr>
-            <a:r>
-              <a:rPr sz="1500" b="0">
-                <a:solidFill>
-                  <a:srgbClr val="EA851B"/>
-                </a:solidFill>
-                <a:latin typeface="Pretendard ExtraBold"/>
-              </a:rPr>
-              <a:t>•  </a:t>
-            </a:r>
-            <a:r>
-              <a:rPr sz="1500" b="0">
-                <a:solidFill>
-                  <a:srgbClr val="181818"/>
-                </a:solidFill>
-                <a:latin typeface="Pretendard SemiBold"/>
-              </a:rPr>
-              <a:t>L1·SSIM·Porosity·SA·S2 6개 손실</a:t>
-            </a:r>
-          </a:p>
-          <a:p>
-            <a:pPr>
-              <a:lnSpc>
-                <a:spcPct val="130000"/>
-              </a:lnSpc>
-              <a:spcAft>
-                <a:spcPts val="600"/>
-              </a:spcAft>
-            </a:pPr>
-            <a:r>
-              <a:rPr sz="1500" b="0">
-                <a:solidFill>
-                  <a:srgbClr val="EA851B"/>
-                </a:solidFill>
-                <a:latin typeface="Pretendard ExtraBold"/>
-              </a:rPr>
-              <a:t>•  </a:t>
-            </a:r>
-            <a:r>
-              <a:rPr sz="1500" b="0">
-                <a:solidFill>
-                  <a:srgbClr val="181818"/>
-                </a:solidFill>
-                <a:latin typeface="Pretendard SemiBold"/>
-              </a:rPr>
-              <a:t>Loss weight 가 결과에 미치는 효과</a:t>
-            </a:r>
-          </a:p>
-          <a:p>
-            <a:pPr>
-              <a:lnSpc>
-                <a:spcPct val="130000"/>
-              </a:lnSpc>
-              <a:spcAft>
-                <a:spcPts val="600"/>
-              </a:spcAft>
-            </a:pPr>
-            <a:r>
-              <a:rPr sz="1500" b="0">
-                <a:solidFill>
-                  <a:srgbClr val="EA851B"/>
-                </a:solidFill>
-                <a:latin typeface="Pretendard ExtraBold"/>
-              </a:rPr>
-              <a:t>•  </a:t>
-            </a:r>
-            <a:r>
-              <a:rPr sz="1500" b="0">
-                <a:solidFill>
-                  <a:srgbClr val="181818"/>
-                </a:solidFill>
-                <a:latin typeface="Pretendard SemiBold"/>
-              </a:rPr>
-              <a:t>Optuna multi-objective HPO</a:t>
-            </a:r>
-          </a:p>
-          <a:p>
-            <a:pPr>
-              <a:lnSpc>
-                <a:spcPct val="130000"/>
-              </a:lnSpc>
-              <a:spcAft>
-                <a:spcPts val="600"/>
-              </a:spcAft>
-            </a:pPr>
-            <a:r>
-              <a:rPr sz="1500" b="0">
-                <a:solidFill>
-                  <a:srgbClr val="EA851B"/>
-                </a:solidFill>
-                <a:latin typeface="Pretendard ExtraBold"/>
-              </a:rPr>
-              <a:t>•  </a:t>
-            </a:r>
-            <a:r>
-              <a:rPr sz="1500" b="0">
-                <a:solidFill>
-                  <a:srgbClr val="181818"/>
-                </a:solidFill>
-                <a:latin typeface="Pretendard SemiBold"/>
-              </a:rPr>
-              <a:t>pip install pytorch-msssim optuna</a:t>
+              <a:t>학습 안정화 · loss weight 균형 · 평가 metric 확장</a:t>
             </a:r>
           </a:p>
         </p:txBody>
@@ -4297,7 +4095,7 @@
                 </a:solidFill>
                 <a:latin typeface="Pretendard Medium"/>
               </a:rPr>
-              <a:t>W2 — DL 입문 · 2조 Intro</a:t>
+              <a:t>W2 · DL 입문 · 2조</a:t>
             </a:r>
           </a:p>
         </p:txBody>
@@ -4369,13 +4167,13 @@
               </a:lnSpc>
             </a:pPr>
             <a:r>
-              <a:rPr sz="2400" b="0">
+              <a:rPr sz="2800" b="0">
                 <a:solidFill>
                   <a:srgbClr val="181818"/>
                 </a:solidFill>
                 <a:latin typeface="Pretendard ExtraBold"/>
               </a:rPr>
-              <a:t>오늘 막혔던 부분 / 더 깊이 알고 싶은 부분 자유롭게</a:t>
+              <a:t>질문 · 토론 환영</a:t>
             </a:r>
           </a:p>
         </p:txBody>
@@ -4432,7 +4230,7 @@
                 </a:solidFill>
                 <a:latin typeface="Pretendard Black"/>
               </a:rPr>
-              <a:t>이번 주가 끝나면</a:t>
+              <a:t>이번 주 학습 목표</a:t>
             </a:r>
           </a:p>
         </p:txBody>
@@ -4514,7 +4312,7 @@
                 </a:solidFill>
                 <a:latin typeface="Pretendard Medium"/>
               </a:rPr>
-              <a:t>W2 — DL 입문 · 2조 Intro</a:t>
+              <a:t>W2 · DL 입문 · 2조</a:t>
             </a:r>
           </a:p>
         </p:txBody>
@@ -4566,8 +4364,8 @@
         </p:nvSpPr>
         <p:spPr>
           <a:xfrm>
-            <a:off x="731520" y="1371600"/>
-            <a:ext cx="10972800" cy="3657600"/>
+            <a:off x="640080" y="1463040"/>
+            <a:ext cx="11155680" cy="4572000"/>
           </a:xfrm>
           <a:prstGeom prst="rect">
             <a:avLst/>
@@ -4604,7 +4402,7 @@
                 </a:solidFill>
                 <a:latin typeface="Pretendard SemiBold"/>
               </a:rPr>
-              <a:t>W1 baseline 의 한계를 명확히 (k가 클수록 |Δφ| 악화)</a:t>
+              <a:t>UNet 구조의 핵심을 코드로 따라가며 이해</a:t>
             </a:r>
           </a:p>
           <a:p>
@@ -4632,7 +4430,7 @@
                 </a:solidFill>
                 <a:latin typeface="Pretendard SemiBold"/>
               </a:rPr>
-              <a:t>2D UNet 아키텍처 핵심 — encoder/decoder/skip-connection</a:t>
+              <a:t>pix2pix 흐름 — 조건부 image-to-image 학습 개요</a:t>
             </a:r>
           </a:p>
           <a:p>
@@ -4660,7 +4458,7 @@
                 </a:solidFill>
                 <a:latin typeface="Pretendard SemiBold"/>
               </a:rPr>
-              <a:t>SliceDataset 으로 sparse triplet 학습 데이터 구성</a:t>
+              <a:t>mini UNet (~30K params)을 본인 노트북에서 직접 학습 (약 10분)</a:t>
             </a:r>
           </a:p>
           <a:p>
@@ -4688,7 +4486,7 @@
                 </a:solidFill>
                 <a:latin typeface="Pretendard SemiBold"/>
               </a:rPr>
-              <a:t>mini UNet (~30K params) 학생 노트북에서 직접 학습</a:t>
+              <a:t>학습 곡선으로 학습 진행 판단</a:t>
             </a:r>
           </a:p>
           <a:p>
@@ -4716,87 +4514,7 @@
                 </a:solidFill>
                 <a:latin typeface="Pretendard SemiBold"/>
               </a:rPr>
-              <a:t>W1 baseline 대비 |Δφ|·SSIM 개선 직접 측정</a:t>
-            </a:r>
-          </a:p>
-        </p:txBody>
-      </p:sp>
-      <p:sp>
-        <p:nvSpPr>
-          <p:cNvPr id="7" name="Rounded Rectangle 6"/>
-          <p:cNvSpPr/>
-          <p:nvPr/>
-        </p:nvSpPr>
-        <p:spPr>
-          <a:xfrm>
-            <a:off x="731520" y="5029200"/>
-            <a:ext cx="10698480" cy="1097280"/>
-          </a:xfrm>
-          <a:prstGeom prst="roundRect">
-            <a:avLst/>
-          </a:prstGeom>
-          <a:solidFill>
-            <a:srgbClr val="FAF5EE"/>
-          </a:solidFill>
-          <a:ln>
-            <a:noFill/>
-          </a:ln>
-        </p:spPr>
-        <p:style>
-          <a:lnRef idx="1">
-            <a:schemeClr val="accent1"/>
-          </a:lnRef>
-          <a:fillRef idx="3">
-            <a:schemeClr val="accent1"/>
-          </a:fillRef>
-          <a:effectRef idx="2">
-            <a:schemeClr val="accent1"/>
-          </a:effectRef>
-          <a:fontRef idx="minor">
-            <a:schemeClr val="lt1"/>
-          </a:fontRef>
-        </p:style>
-        <p:txBody>
-          <a:bodyPr rtlCol="0" anchor="ctr"/>
-          <a:lstStyle/>
-          <a:p/>
-        </p:txBody>
-      </p:sp>
-      <p:sp>
-        <p:nvSpPr>
-          <p:cNvPr id="8" name="TextBox 7"/>
-          <p:cNvSpPr txBox="1"/>
-          <p:nvPr/>
-        </p:nvSpPr>
-        <p:spPr>
-          <a:xfrm>
-            <a:off x="914400" y="5394960"/>
-            <a:ext cx="10332720" cy="548640"/>
-          </a:xfrm>
-          <a:prstGeom prst="rect">
-            <a:avLst/>
-          </a:prstGeom>
-          <a:noFill/>
-        </p:spPr>
-        <p:txBody>
-          <a:bodyPr wrap="square" lIns="45720" rIns="45720">
-            <a:spAutoFit/>
-          </a:bodyPr>
-          <a:lstStyle/>
-          <a:p>
-            <a:pPr algn="ctr">
-              <a:lnSpc>
-                <a:spcPct val="115000"/>
-              </a:lnSpc>
-            </a:pPr>
-            <a:r>
-              <a:rPr sz="2000" b="0">
-                <a:solidFill>
-                  <a:srgbClr val="EA851B"/>
-                </a:solidFill>
-                <a:latin typeface="Pretendard ExtraBold"/>
-              </a:rPr>
-              <a:t>학습 시간 옵션: 10분 (fast 권장)</a:t>
+              <a:t>W1 Linear baseline 대비 + 다른 도메인 일반화 평가</a:t>
             </a:r>
           </a:p>
         </p:txBody>
@@ -4853,7 +4571,7 @@
                 </a:solidFill>
                 <a:latin typeface="Pretendard Black"/>
               </a:rPr>
-              <a:t>UNet 한눈에 보기</a:t>
+              <a:t>UNet · pix2pix 한눈에 보기</a:t>
             </a:r>
           </a:p>
         </p:txBody>
@@ -4935,7 +4653,7 @@
                 </a:solidFill>
                 <a:latin typeface="Pretendard Medium"/>
               </a:rPr>
-              <a:t>W2 — DL 입문 · 2조 Intro</a:t>
+              <a:t>W2 · DL 입문 · 2조</a:t>
             </a:r>
           </a:p>
         </p:txBody>
@@ -5013,7 +4731,7 @@
                 </a:solidFill>
                 <a:latin typeface="Pretendard Black"/>
               </a:rPr>
-              <a:t>Encoder (수축)</a:t>
+              <a:t>Encoder (수축 경로)</a:t>
             </a:r>
           </a:p>
         </p:txBody>
@@ -5092,7 +4810,7 @@
                 </a:solidFill>
                 <a:latin typeface="Pretendard SemiBold"/>
               </a:rPr>
-              <a:t>영상이 작아지며 추상화</a:t>
+              <a:t>영상이 작아지며 특징 추상화</a:t>
             </a:r>
           </a:p>
           <a:p>
@@ -5120,7 +4838,7 @@
                 </a:solidFill>
                 <a:latin typeface="Pretendard SemiBold"/>
               </a:rPr>
-              <a:t>"높은 수준 특징" 추출</a:t>
+              <a:t>높은 수준의 표현 추출</a:t>
             </a:r>
           </a:p>
         </p:txBody>
@@ -5159,7 +4877,7 @@
                 </a:solidFill>
                 <a:latin typeface="Pretendard Black"/>
               </a:rPr>
-              <a:t>Decoder (확장)</a:t>
+              <a:t>Decoder (확장 경로)</a:t>
             </a:r>
           </a:p>
         </p:txBody>
@@ -5210,7 +4928,7 @@
                 </a:solidFill>
                 <a:latin typeface="Pretendard SemiBold"/>
               </a:rPr>
-              <a:t>ConvTranspose 로 해상도 복원</a:t>
+              <a:t>ConvTranspose로 해상도 복원</a:t>
             </a:r>
           </a:p>
           <a:p>
@@ -5238,7 +4956,7 @@
                 </a:solidFill>
                 <a:latin typeface="Pretendard SemiBold"/>
               </a:rPr>
-              <a:t>Skip-connection 으로 detail 복구</a:t>
+              <a:t>Skip-connection으로 detail 복구</a:t>
             </a:r>
           </a:p>
           <a:p>
@@ -5266,7 +4984,7 @@
                 </a:solidFill>
                 <a:latin typeface="Pretendard SemiBold"/>
               </a:rPr>
-              <a:t>"픽셀 단위 출력" 생성</a:t>
+              <a:t>픽셀 단위 출력 생성</a:t>
             </a:r>
           </a:p>
         </p:txBody>
@@ -5279,8 +4997,8 @@
         </p:nvSpPr>
         <p:spPr>
           <a:xfrm>
-            <a:off x="731520" y="5212080"/>
-            <a:ext cx="10698480" cy="914400"/>
+            <a:off x="640080" y="5212080"/>
+            <a:ext cx="11155680" cy="914400"/>
           </a:xfrm>
           <a:prstGeom prst="roundRect">
             <a:avLst/>
@@ -5320,8 +5038,8 @@
         </p:nvSpPr>
         <p:spPr>
           <a:xfrm>
-            <a:off x="914400" y="5440680"/>
-            <a:ext cx="10332720" cy="457200"/>
+            <a:off x="822960" y="5440680"/>
+            <a:ext cx="10789920" cy="457200"/>
           </a:xfrm>
           <a:prstGeom prst="rect">
             <a:avLst/>
@@ -5340,13 +5058,13 @@
               </a:lnSpc>
             </a:pPr>
             <a:r>
-              <a:rPr sz="1800" b="0">
+              <a:rPr sz="1700" b="0">
                 <a:solidFill>
                   <a:srgbClr val="EA851B"/>
                 </a:solidFill>
                 <a:latin typeface="Pretendard ExtraBold"/>
               </a:rPr>
-              <a:t>★ Skip-connection = UNet 의 핵심. detail 보존</a:t>
+              <a:t>Skip-connection이 UNet의 핵심 — Encoder의 detail을 Decoder로 직접 전달</a:t>
             </a:r>
           </a:p>
         </p:txBody>
@@ -5403,7 +5121,7 @@
                 </a:solidFill>
                 <a:latin typeface="Pretendard Black"/>
               </a:rPr>
-              <a:t>본 mini UNet 사양</a:t>
+              <a:t>mini UNet 사양</a:t>
             </a:r>
           </a:p>
         </p:txBody>
@@ -5485,7 +5203,7 @@
                 </a:solidFill>
                 <a:latin typeface="Pretendard Medium"/>
               </a:rPr>
-              <a:t>W2 — DL 입문 · 2조 Intro</a:t>
+              <a:t>W2 · DL 입문 · 2조</a:t>
             </a:r>
           </a:p>
         </p:txBody>
@@ -5538,7 +5256,7 @@
         <p:spPr>
           <a:xfrm>
             <a:off x="731520" y="1371600"/>
-            <a:ext cx="2286000" cy="457200"/>
+            <a:ext cx="2743200" cy="457200"/>
           </a:xfrm>
           <a:prstGeom prst="rect">
             <a:avLst/>
@@ -5576,8 +5294,8 @@
         </p:nvSpPr>
         <p:spPr>
           <a:xfrm>
-            <a:off x="3200400" y="1371600"/>
-            <a:ext cx="8686800" cy="457200"/>
+            <a:off x="3657600" y="1371600"/>
+            <a:ext cx="8229600" cy="457200"/>
           </a:xfrm>
           <a:prstGeom prst="rect">
             <a:avLst/>
@@ -5616,7 +5334,7 @@
         <p:spPr>
           <a:xfrm>
             <a:off x="731520" y="2011680"/>
-            <a:ext cx="2286000" cy="457200"/>
+            <a:ext cx="2743200" cy="457200"/>
           </a:xfrm>
           <a:prstGeom prst="rect">
             <a:avLst/>
@@ -5654,8 +5372,8 @@
         </p:nvSpPr>
         <p:spPr>
           <a:xfrm>
-            <a:off x="3200400" y="2011680"/>
-            <a:ext cx="8686800" cy="457200"/>
+            <a:off x="3657600" y="2011680"/>
+            <a:ext cx="8229600" cy="457200"/>
           </a:xfrm>
           <a:prstGeom prst="rect">
             <a:avLst/>
@@ -5694,7 +5412,7 @@
         <p:spPr>
           <a:xfrm>
             <a:off x="731520" y="2651760"/>
-            <a:ext cx="2286000" cy="457200"/>
+            <a:ext cx="2743200" cy="457200"/>
           </a:xfrm>
           <a:prstGeom prst="rect">
             <a:avLst/>
@@ -5732,8 +5450,8 @@
         </p:nvSpPr>
         <p:spPr>
           <a:xfrm>
-            <a:off x="3200400" y="2651760"/>
-            <a:ext cx="8686800" cy="457200"/>
+            <a:off x="3657600" y="2651760"/>
+            <a:ext cx="8229600" cy="457200"/>
           </a:xfrm>
           <a:prstGeom prst="rect">
             <a:avLst/>
@@ -5758,7 +5476,7 @@
                 </a:solidFill>
                 <a:latin typeface="Pretendard SemiBold"/>
               </a:rPr>
-              <a:t>Encoder/Decoder 각 3 단계</a:t>
+              <a:t>Encoder · Decoder 각 3단계</a:t>
             </a:r>
           </a:p>
         </p:txBody>
@@ -5772,7 +5490,7 @@
         <p:spPr>
           <a:xfrm>
             <a:off x="731520" y="3291839"/>
-            <a:ext cx="2286000" cy="457200"/>
+            <a:ext cx="2743200" cy="457200"/>
           </a:xfrm>
           <a:prstGeom prst="rect">
             <a:avLst/>
@@ -5810,8 +5528,8 @@
         </p:nvSpPr>
         <p:spPr>
           <a:xfrm>
-            <a:off x="3200400" y="3291839"/>
-            <a:ext cx="8686800" cy="457200"/>
+            <a:off x="3657600" y="3291839"/>
+            <a:ext cx="8229600" cy="457200"/>
           </a:xfrm>
           <a:prstGeom prst="rect">
             <a:avLst/>
@@ -5836,7 +5554,7 @@
                 </a:solidFill>
                 <a:latin typeface="Pretendard SemiBold"/>
               </a:rPr>
-              <a:t>각 단계마다 encoder→decoder 연결</a:t>
+              <a:t>각 단계마다 encoder → decoder 연결</a:t>
             </a:r>
           </a:p>
         </p:txBody>
@@ -5850,7 +5568,7 @@
         <p:spPr>
           <a:xfrm>
             <a:off x="731520" y="3931920"/>
-            <a:ext cx="2286000" cy="457200"/>
+            <a:ext cx="2743200" cy="457200"/>
           </a:xfrm>
           <a:prstGeom prst="rect">
             <a:avLst/>
@@ -5888,8 +5606,8 @@
         </p:nvSpPr>
         <p:spPr>
           <a:xfrm>
-            <a:off x="3200400" y="3931920"/>
-            <a:ext cx="8686800" cy="457200"/>
+            <a:off x="3657600" y="3931920"/>
+            <a:ext cx="8229600" cy="457200"/>
           </a:xfrm>
           <a:prstGeom prst="rect">
             <a:avLst/>
@@ -5914,7 +5632,7 @@
                 </a:solidFill>
                 <a:latin typeface="Pretendard SemiBold"/>
               </a:rPr>
-              <a:t>base=8 → 29K  /  base=16 → 117K</a:t>
+              <a:t>base=8 → ~29K · base=16 → ~117K</a:t>
             </a:r>
           </a:p>
         </p:txBody>
@@ -5928,7 +5646,7 @@
         <p:spPr>
           <a:xfrm>
             <a:off x="731520" y="4572000"/>
-            <a:ext cx="2286000" cy="457200"/>
+            <a:ext cx="2743200" cy="457200"/>
           </a:xfrm>
           <a:prstGeom prst="rect">
             <a:avLst/>
@@ -5953,7 +5671,7 @@
                 </a:solidFill>
                 <a:latin typeface="Pretendard ExtraBold"/>
               </a:rPr>
-              <a:t>학습 시간</a:t>
+              <a:t>학습 시간 (CPU)</a:t>
             </a:r>
           </a:p>
         </p:txBody>
@@ -5966,8 +5684,8 @@
         </p:nvSpPr>
         <p:spPr>
           <a:xfrm>
-            <a:off x="3200400" y="4572000"/>
-            <a:ext cx="8686800" cy="457200"/>
+            <a:off x="3657600" y="4572000"/>
+            <a:ext cx="8229600" cy="457200"/>
           </a:xfrm>
           <a:prstGeom prst="rect">
             <a:avLst/>
@@ -5992,7 +5710,7 @@
                 </a:solidFill>
                 <a:latin typeface="Pretendard SemiBold"/>
               </a:rPr>
-              <a:t>CPU 10분 (fast) ~ 60분 (full)</a:t>
+              <a:t>fast 10분 / standard 30분 / full 60분</a:t>
             </a:r>
           </a:p>
         </p:txBody>
@@ -6131,7 +5849,7 @@
                 </a:solidFill>
                 <a:latin typeface="Pretendard Medium"/>
               </a:rPr>
-              <a:t>W2 — DL 입문 · 2조 Intro</a:t>
+              <a:t>W2 · DL 입문 · 2조</a:t>
             </a:r>
           </a:p>
         </p:txBody>
@@ -6183,7 +5901,7 @@
         </p:nvSpPr>
         <p:spPr>
           <a:xfrm>
-            <a:off x="731520" y="1371600"/>
+            <a:off x="640080" y="1371600"/>
             <a:ext cx="10972800" cy="457200"/>
           </a:xfrm>
           <a:prstGeom prst="rect">
@@ -6222,8 +5940,8 @@
         </p:nvSpPr>
         <p:spPr>
           <a:xfrm>
-            <a:off x="731520" y="2011680"/>
-            <a:ext cx="10972800" cy="3657600"/>
+            <a:off x="640080" y="2011680"/>
+            <a:ext cx="11155680" cy="3657600"/>
           </a:xfrm>
           <a:prstGeom prst="rect">
             <a:avLst/>
@@ -6260,7 +5978,7 @@
                 </a:solidFill>
                 <a:latin typeface="Pretendard SemiBold"/>
               </a:rPr>
-              <a:t>input = [slice_before, slice_after] — sparse에서 측정한 "앞·뒤" 슬라이스</a:t>
+              <a:t>input = [slice_before, slice_after] — sparse 측정에서 얻은 앞·뒤 슬라이스</a:t>
             </a:r>
           </a:p>
           <a:p>
@@ -6288,7 +6006,7 @@
                 </a:solidFill>
                 <a:latin typeface="Pretendard SemiBold"/>
               </a:rPr>
-              <a:t>target = slice_middle — 가운데 슬라이스 (정답 GT)</a:t>
+              <a:t>target = slice_middle — 가운데 슬라이스 GT (학습 시에만 사용)</a:t>
             </a:r>
           </a:p>
           <a:p>
@@ -6316,7 +6034,7 @@
                 </a:solidFill>
                 <a:latin typeface="Pretendard SemiBold"/>
               </a:rPr>
-              <a:t>학습 = "input 으로부터 target을 예측하는 함수 학습"</a:t>
+              <a:t>patch_size=64 random crop으로 학습 가속</a:t>
             </a:r>
           </a:p>
           <a:p>
@@ -6344,35 +6062,7 @@
                 </a:solidFill>
                 <a:latin typeface="Pretendard SemiBold"/>
               </a:rPr>
-              <a:t>patch_size=64 random crop — 학습 속도 16배 ↑ (256² → 64²)</a:t>
-            </a:r>
-          </a:p>
-          <a:p>
-            <a:pPr>
-              <a:lnSpc>
-                <a:spcPct val="130000"/>
-              </a:lnSpc>
-              <a:spcAft>
-                <a:spcPts val="600"/>
-              </a:spcAft>
-            </a:pPr>
-            <a:r>
-              <a:rPr sz="1800" b="0">
-                <a:solidFill>
-                  <a:srgbClr val="EA851B"/>
-                </a:solidFill>
-                <a:latin typeface="Pretendard ExtraBold"/>
-              </a:rPr>
-              <a:t>•  </a:t>
-            </a:r>
-            <a:r>
-              <a:rPr sz="1800" b="0">
-                <a:solidFill>
-                  <a:srgbClr val="181818"/>
-                </a:solidFill>
-                <a:latin typeface="Pretendard SemiBold"/>
-              </a:rPr>
-              <a:t>augment=True — flip 증강으로 데이터 양 늘림</a:t>
+              <a:t>augment=True — flip 증강</a:t>
             </a:r>
           </a:p>
         </p:txBody>
@@ -6429,7 +6119,7 @@
                 </a:solidFill>
                 <a:latin typeface="Pretendard Black"/>
               </a:rPr>
-              <a:t>PRESET 옵션 — 학습 시간 vs 품질</a:t>
+              <a:t>학습 옵션 (PRESET)</a:t>
             </a:r>
           </a:p>
         </p:txBody>
@@ -6511,7 +6201,7 @@
                 </a:solidFill>
                 <a:latin typeface="Pretendard Medium"/>
               </a:rPr>
-              <a:t>W2 — DL 입문 · 2조 Intro</a:t>
+              <a:t>W2 · DL 입문 · 2조</a:t>
             </a:r>
           </a:p>
         </p:txBody>
@@ -6563,8 +6253,8 @@
         </p:nvSpPr>
         <p:spPr>
           <a:xfrm>
-            <a:off x="548640" y="1371600"/>
-            <a:ext cx="1828800" cy="457200"/>
+            <a:off x="640080" y="1554480"/>
+            <a:ext cx="2194560" cy="457200"/>
           </a:xfrm>
           <a:prstGeom prst="rect">
             <a:avLst/>
@@ -6583,7 +6273,7 @@
               </a:lnSpc>
             </a:pPr>
             <a:r>
-              <a:rPr sz="1500" b="0">
+              <a:rPr sz="1600" b="0">
                 <a:solidFill>
                   <a:srgbClr val="EA851B"/>
                 </a:solidFill>
@@ -6602,8 +6292,8 @@
         </p:nvSpPr>
         <p:spPr>
           <a:xfrm>
-            <a:off x="2468880" y="1371600"/>
-            <a:ext cx="1828800" cy="457200"/>
+            <a:off x="2926080" y="1554480"/>
+            <a:ext cx="2194560" cy="457200"/>
           </a:xfrm>
           <a:prstGeom prst="rect">
             <a:avLst/>
@@ -6622,7 +6312,7 @@
               </a:lnSpc>
             </a:pPr>
             <a:r>
-              <a:rPr sz="1500" b="0">
+              <a:rPr sz="1600" b="0">
                 <a:solidFill>
                   <a:srgbClr val="EA851B"/>
                 </a:solidFill>
@@ -6641,8 +6331,8 @@
         </p:nvSpPr>
         <p:spPr>
           <a:xfrm>
-            <a:off x="4389120" y="1371600"/>
-            <a:ext cx="1828800" cy="457200"/>
+            <a:off x="5212080" y="1554480"/>
+            <a:ext cx="2194560" cy="457200"/>
           </a:xfrm>
           <a:prstGeom prst="rect">
             <a:avLst/>
@@ -6661,7 +6351,7 @@
               </a:lnSpc>
             </a:pPr>
             <a:r>
-              <a:rPr sz="1500" b="0">
+              <a:rPr sz="1600" b="0">
                 <a:solidFill>
                   <a:srgbClr val="EA851B"/>
                 </a:solidFill>
@@ -6680,8 +6370,8 @@
         </p:nvSpPr>
         <p:spPr>
           <a:xfrm>
-            <a:off x="6309360" y="1371600"/>
-            <a:ext cx="1828800" cy="457200"/>
+            <a:off x="7498079" y="1554480"/>
+            <a:ext cx="2194560" cy="457200"/>
           </a:xfrm>
           <a:prstGeom prst="rect">
             <a:avLst/>
@@ -6700,13 +6390,13 @@
               </a:lnSpc>
             </a:pPr>
             <a:r>
-              <a:rPr sz="1500" b="0">
+              <a:rPr sz="1600" b="0">
                 <a:solidFill>
                   <a:srgbClr val="EA851B"/>
                 </a:solidFill>
                 <a:latin typeface="Pretendard Black"/>
               </a:rPr>
-              <a:t>Time</a:t>
+              <a:t>Time (CPU)</a:t>
             </a:r>
           </a:p>
         </p:txBody>
@@ -6719,8 +6409,8 @@
         </p:nvSpPr>
         <p:spPr>
           <a:xfrm>
-            <a:off x="8229600" y="1371600"/>
-            <a:ext cx="1828800" cy="457200"/>
+            <a:off x="9784080" y="1554480"/>
+            <a:ext cx="2194560" cy="457200"/>
           </a:xfrm>
           <a:prstGeom prst="rect">
             <a:avLst/>
@@ -6739,7 +6429,7 @@
               </a:lnSpc>
             </a:pPr>
             <a:r>
-              <a:rPr sz="1500" b="0">
+              <a:rPr sz="1600" b="0">
                 <a:solidFill>
                   <a:srgbClr val="EA851B"/>
                 </a:solidFill>
@@ -6758,8 +6448,8 @@
         </p:nvSpPr>
         <p:spPr>
           <a:xfrm>
-            <a:off x="10149840" y="1371600"/>
-            <a:ext cx="1828800" cy="457200"/>
+            <a:off x="640080" y="2286000"/>
+            <a:ext cx="2194560" cy="457200"/>
           </a:xfrm>
           <a:prstGeom prst="rect">
             <a:avLst/>
@@ -6778,13 +6468,13 @@
               </a:lnSpc>
             </a:pPr>
             <a:r>
-              <a:rPr sz="1500" b="0">
-                <a:solidFill>
-                  <a:srgbClr val="EA851B"/>
-                </a:solidFill>
-                <a:latin typeface="Pretendard Black"/>
-              </a:rPr>
-              <a:t>목적</a:t>
+              <a:rPr sz="1600" b="0">
+                <a:solidFill>
+                  <a:srgbClr val="181818"/>
+                </a:solidFill>
+                <a:latin typeface="Pretendard SemiBold"/>
+              </a:rPr>
+              <a:t>fast</a:t>
             </a:r>
           </a:p>
         </p:txBody>
@@ -6797,8 +6487,8 @@
         </p:nvSpPr>
         <p:spPr>
           <a:xfrm>
-            <a:off x="548640" y="2011680"/>
-            <a:ext cx="1828800" cy="457200"/>
+            <a:off x="2926080" y="2286000"/>
+            <a:ext cx="2194560" cy="457200"/>
           </a:xfrm>
           <a:prstGeom prst="rect">
             <a:avLst/>
@@ -6817,13 +6507,13 @@
               </a:lnSpc>
             </a:pPr>
             <a:r>
-              <a:rPr sz="1500" b="0">
+              <a:rPr sz="1600" b="0">
                 <a:solidFill>
                   <a:srgbClr val="181818"/>
                 </a:solidFill>
                 <a:latin typeface="Pretendard SemiBold"/>
               </a:rPr>
-              <a:t>fast</a:t>
+              <a:t>base=8</a:t>
             </a:r>
           </a:p>
         </p:txBody>
@@ -6836,8 +6526,8 @@
         </p:nvSpPr>
         <p:spPr>
           <a:xfrm>
-            <a:off x="2468880" y="2011680"/>
-            <a:ext cx="1828800" cy="457200"/>
+            <a:off x="5212080" y="2286000"/>
+            <a:ext cx="2194560" cy="457200"/>
           </a:xfrm>
           <a:prstGeom prst="rect">
             <a:avLst/>
@@ -6856,13 +6546,13 @@
               </a:lnSpc>
             </a:pPr>
             <a:r>
-              <a:rPr sz="1500" b="0">
+              <a:rPr sz="1600" b="0">
                 <a:solidFill>
                   <a:srgbClr val="181818"/>
                 </a:solidFill>
                 <a:latin typeface="Pretendard SemiBold"/>
               </a:rPr>
-              <a:t>base=8</a:t>
+              <a:t>20</a:t>
             </a:r>
           </a:p>
         </p:txBody>
@@ -6875,8 +6565,8 @@
         </p:nvSpPr>
         <p:spPr>
           <a:xfrm>
-            <a:off x="4389120" y="2011680"/>
-            <a:ext cx="1828800" cy="457200"/>
+            <a:off x="7498079" y="2286000"/>
+            <a:ext cx="2194560" cy="457200"/>
           </a:xfrm>
           <a:prstGeom prst="rect">
             <a:avLst/>
@@ -6895,13 +6585,13 @@
               </a:lnSpc>
             </a:pPr>
             <a:r>
-              <a:rPr sz="1500" b="0">
+              <a:rPr sz="1600" b="0">
                 <a:solidFill>
                   <a:srgbClr val="181818"/>
                 </a:solidFill>
                 <a:latin typeface="Pretendard SemiBold"/>
               </a:rPr>
-              <a:t>20</a:t>
+              <a:t>~10분</a:t>
             </a:r>
           </a:p>
         </p:txBody>
@@ -6914,8 +6604,8 @@
         </p:nvSpPr>
         <p:spPr>
           <a:xfrm>
-            <a:off x="6309360" y="2011680"/>
-            <a:ext cx="1828800" cy="457200"/>
+            <a:off x="9784080" y="2286000"/>
+            <a:ext cx="2194560" cy="457200"/>
           </a:xfrm>
           <a:prstGeom prst="rect">
             <a:avLst/>
@@ -6934,13 +6624,13 @@
               </a:lnSpc>
             </a:pPr>
             <a:r>
-              <a:rPr sz="1500" b="0">
+              <a:rPr sz="1600" b="0">
                 <a:solidFill>
                   <a:srgbClr val="181818"/>
                 </a:solidFill>
                 <a:latin typeface="Pretendard SemiBold"/>
               </a:rPr>
-              <a:t>~10 분</a:t>
+              <a:t>~29K</a:t>
             </a:r>
           </a:p>
         </p:txBody>
@@ -6953,8 +6643,8 @@
         </p:nvSpPr>
         <p:spPr>
           <a:xfrm>
-            <a:off x="8229600" y="2011680"/>
-            <a:ext cx="1828800" cy="457200"/>
+            <a:off x="640080" y="2926080"/>
+            <a:ext cx="2194560" cy="457200"/>
           </a:xfrm>
           <a:prstGeom prst="rect">
             <a:avLst/>
@@ -6973,13 +6663,13 @@
               </a:lnSpc>
             </a:pPr>
             <a:r>
-              <a:rPr sz="1500" b="0">
+              <a:rPr sz="1600" b="0">
                 <a:solidFill>
                   <a:srgbClr val="181818"/>
                 </a:solidFill>
                 <a:latin typeface="Pretendard SemiBold"/>
               </a:rPr>
-              <a:t>29K</a:t>
+              <a:t>standard</a:t>
             </a:r>
           </a:p>
         </p:txBody>
@@ -6992,8 +6682,8 @@
         </p:nvSpPr>
         <p:spPr>
           <a:xfrm>
-            <a:off x="10149840" y="2011680"/>
-            <a:ext cx="1828800" cy="457200"/>
+            <a:off x="2926080" y="2926080"/>
+            <a:ext cx="2194560" cy="457200"/>
           </a:xfrm>
           <a:prstGeom prst="rect">
             <a:avLst/>
@@ -7012,13 +6702,13 @@
               </a:lnSpc>
             </a:pPr>
             <a:r>
-              <a:rPr sz="1500" b="0">
+              <a:rPr sz="1600" b="0">
                 <a:solidFill>
                   <a:srgbClr val="181818"/>
                 </a:solidFill>
                 <a:latin typeface="Pretendard SemiBold"/>
               </a:rPr>
-              <a:t>작동 확인</a:t>
+              <a:t>base=16</a:t>
             </a:r>
           </a:p>
         </p:txBody>
@@ -7031,8 +6721,8 @@
         </p:nvSpPr>
         <p:spPr>
           <a:xfrm>
-            <a:off x="548640" y="2651760"/>
-            <a:ext cx="1828800" cy="457200"/>
+            <a:off x="5212080" y="2926080"/>
+            <a:ext cx="2194560" cy="457200"/>
           </a:xfrm>
           <a:prstGeom prst="rect">
             <a:avLst/>
@@ -7051,13 +6741,13 @@
               </a:lnSpc>
             </a:pPr>
             <a:r>
-              <a:rPr sz="1500" b="0">
+              <a:rPr sz="1600" b="0">
                 <a:solidFill>
                   <a:srgbClr val="181818"/>
                 </a:solidFill>
                 <a:latin typeface="Pretendard SemiBold"/>
               </a:rPr>
-              <a:t>standard</a:t>
+              <a:t>50</a:t>
             </a:r>
           </a:p>
         </p:txBody>
@@ -7070,8 +6760,8 @@
         </p:nvSpPr>
         <p:spPr>
           <a:xfrm>
-            <a:off x="2468880" y="2651760"/>
-            <a:ext cx="1828800" cy="457200"/>
+            <a:off x="7498079" y="2926080"/>
+            <a:ext cx="2194560" cy="457200"/>
           </a:xfrm>
           <a:prstGeom prst="rect">
             <a:avLst/>
@@ -7090,13 +6780,13 @@
               </a:lnSpc>
             </a:pPr>
             <a:r>
-              <a:rPr sz="1500" b="0">
+              <a:rPr sz="1600" b="0">
                 <a:solidFill>
                   <a:srgbClr val="181818"/>
                 </a:solidFill>
                 <a:latin typeface="Pretendard SemiBold"/>
               </a:rPr>
-              <a:t>base=16</a:t>
+              <a:t>~30분</a:t>
             </a:r>
           </a:p>
         </p:txBody>
@@ -7109,8 +6799,8 @@
         </p:nvSpPr>
         <p:spPr>
           <a:xfrm>
-            <a:off x="4389120" y="2651760"/>
-            <a:ext cx="1828800" cy="457200"/>
+            <a:off x="9784080" y="2926080"/>
+            <a:ext cx="2194560" cy="457200"/>
           </a:xfrm>
           <a:prstGeom prst="rect">
             <a:avLst/>
@@ -7129,378 +6819,27 @@
               </a:lnSpc>
             </a:pPr>
             <a:r>
-              <a:rPr sz="1500" b="0">
+              <a:rPr sz="1600" b="0">
                 <a:solidFill>
                   <a:srgbClr val="181818"/>
                 </a:solidFill>
                 <a:latin typeface="Pretendard SemiBold"/>
               </a:rPr>
-              <a:t>50</a:t>
-            </a:r>
-          </a:p>
-        </p:txBody>
-      </p:sp>
-      <p:sp>
-        <p:nvSpPr>
-          <p:cNvPr id="21" name="TextBox 20"/>
-          <p:cNvSpPr txBox="1"/>
-          <p:nvPr/>
-        </p:nvSpPr>
-        <p:spPr>
-          <a:xfrm>
-            <a:off x="6309360" y="2651760"/>
-            <a:ext cx="1828800" cy="457200"/>
-          </a:xfrm>
-          <a:prstGeom prst="rect">
-            <a:avLst/>
-          </a:prstGeom>
-          <a:noFill/>
-        </p:spPr>
-        <p:txBody>
-          <a:bodyPr wrap="square" lIns="45720" rIns="45720">
-            <a:spAutoFit/>
-          </a:bodyPr>
-          <a:lstStyle/>
-          <a:p>
-            <a:pPr algn="l">
-              <a:lnSpc>
-                <a:spcPct val="115000"/>
-              </a:lnSpc>
-            </a:pPr>
-            <a:r>
-              <a:rPr sz="1500" b="0">
-                <a:solidFill>
-                  <a:srgbClr val="181818"/>
-                </a:solidFill>
-                <a:latin typeface="Pretendard SemiBold"/>
-              </a:rPr>
-              <a:t>~30 분</a:t>
-            </a:r>
-          </a:p>
-        </p:txBody>
-      </p:sp>
-      <p:sp>
-        <p:nvSpPr>
-          <p:cNvPr id="22" name="TextBox 21"/>
-          <p:cNvSpPr txBox="1"/>
-          <p:nvPr/>
-        </p:nvSpPr>
-        <p:spPr>
-          <a:xfrm>
-            <a:off x="8229600" y="2651760"/>
-            <a:ext cx="1828800" cy="457200"/>
-          </a:xfrm>
-          <a:prstGeom prst="rect">
-            <a:avLst/>
-          </a:prstGeom>
-          <a:noFill/>
-        </p:spPr>
-        <p:txBody>
-          <a:bodyPr wrap="square" lIns="45720" rIns="45720">
-            <a:spAutoFit/>
-          </a:bodyPr>
-          <a:lstStyle/>
-          <a:p>
-            <a:pPr algn="l">
-              <a:lnSpc>
-                <a:spcPct val="115000"/>
-              </a:lnSpc>
-            </a:pPr>
-            <a:r>
-              <a:rPr sz="1500" b="0">
-                <a:solidFill>
-                  <a:srgbClr val="181818"/>
-                </a:solidFill>
-                <a:latin typeface="Pretendard SemiBold"/>
-              </a:rPr>
-              <a:t>117K</a:t>
-            </a:r>
-          </a:p>
-        </p:txBody>
-      </p:sp>
-      <p:sp>
-        <p:nvSpPr>
-          <p:cNvPr id="23" name="TextBox 22"/>
-          <p:cNvSpPr txBox="1"/>
-          <p:nvPr/>
-        </p:nvSpPr>
-        <p:spPr>
-          <a:xfrm>
-            <a:off x="10149840" y="2651760"/>
-            <a:ext cx="1828800" cy="457200"/>
-          </a:xfrm>
-          <a:prstGeom prst="rect">
-            <a:avLst/>
-          </a:prstGeom>
-          <a:noFill/>
-        </p:spPr>
-        <p:txBody>
-          <a:bodyPr wrap="square" lIns="45720" rIns="45720">
-            <a:spAutoFit/>
-          </a:bodyPr>
-          <a:lstStyle/>
-          <a:p>
-            <a:pPr algn="l">
-              <a:lnSpc>
-                <a:spcPct val="115000"/>
-              </a:lnSpc>
-            </a:pPr>
-            <a:r>
-              <a:rPr sz="1500" b="0">
-                <a:solidFill>
-                  <a:srgbClr val="181818"/>
-                </a:solidFill>
-                <a:latin typeface="Pretendard SemiBold"/>
-              </a:rPr>
-              <a:t>의미있는 비교</a:t>
-            </a:r>
-          </a:p>
-        </p:txBody>
-      </p:sp>
-      <p:sp>
-        <p:nvSpPr>
-          <p:cNvPr id="24" name="TextBox 23"/>
-          <p:cNvSpPr txBox="1"/>
-          <p:nvPr/>
-        </p:nvSpPr>
-        <p:spPr>
-          <a:xfrm>
-            <a:off x="548640" y="3291840"/>
-            <a:ext cx="1828800" cy="457200"/>
-          </a:xfrm>
-          <a:prstGeom prst="rect">
-            <a:avLst/>
-          </a:prstGeom>
-          <a:noFill/>
-        </p:spPr>
-        <p:txBody>
-          <a:bodyPr wrap="square" lIns="45720" rIns="45720">
-            <a:spAutoFit/>
-          </a:bodyPr>
-          <a:lstStyle/>
-          <a:p>
-            <a:pPr algn="l">
-              <a:lnSpc>
-                <a:spcPct val="115000"/>
-              </a:lnSpc>
-            </a:pPr>
-            <a:r>
-              <a:rPr sz="1500" b="0">
-                <a:solidFill>
-                  <a:srgbClr val="181818"/>
-                </a:solidFill>
-                <a:latin typeface="Pretendard SemiBold"/>
-              </a:rPr>
-              <a:t>full</a:t>
-            </a:r>
-          </a:p>
-        </p:txBody>
-      </p:sp>
-      <p:sp>
-        <p:nvSpPr>
-          <p:cNvPr id="25" name="TextBox 24"/>
-          <p:cNvSpPr txBox="1"/>
-          <p:nvPr/>
-        </p:nvSpPr>
-        <p:spPr>
-          <a:xfrm>
-            <a:off x="2468880" y="3291840"/>
-            <a:ext cx="1828800" cy="457200"/>
-          </a:xfrm>
-          <a:prstGeom prst="rect">
-            <a:avLst/>
-          </a:prstGeom>
-          <a:noFill/>
-        </p:spPr>
-        <p:txBody>
-          <a:bodyPr wrap="square" lIns="45720" rIns="45720">
-            <a:spAutoFit/>
-          </a:bodyPr>
-          <a:lstStyle/>
-          <a:p>
-            <a:pPr algn="l">
-              <a:lnSpc>
-                <a:spcPct val="115000"/>
-              </a:lnSpc>
-            </a:pPr>
-            <a:r>
-              <a:rPr sz="1500" b="0">
-                <a:solidFill>
-                  <a:srgbClr val="181818"/>
-                </a:solidFill>
-                <a:latin typeface="Pretendard SemiBold"/>
-              </a:rPr>
-              <a:t>base=16</a:t>
-            </a:r>
-          </a:p>
-        </p:txBody>
-      </p:sp>
-      <p:sp>
-        <p:nvSpPr>
-          <p:cNvPr id="26" name="TextBox 25"/>
-          <p:cNvSpPr txBox="1"/>
-          <p:nvPr/>
-        </p:nvSpPr>
-        <p:spPr>
-          <a:xfrm>
-            <a:off x="4389120" y="3291840"/>
-            <a:ext cx="1828800" cy="457200"/>
-          </a:xfrm>
-          <a:prstGeom prst="rect">
-            <a:avLst/>
-          </a:prstGeom>
-          <a:noFill/>
-        </p:spPr>
-        <p:txBody>
-          <a:bodyPr wrap="square" lIns="45720" rIns="45720">
-            <a:spAutoFit/>
-          </a:bodyPr>
-          <a:lstStyle/>
-          <a:p>
-            <a:pPr algn="l">
-              <a:lnSpc>
-                <a:spcPct val="115000"/>
-              </a:lnSpc>
-            </a:pPr>
-            <a:r>
-              <a:rPr sz="1500" b="0">
-                <a:solidFill>
-                  <a:srgbClr val="181818"/>
-                </a:solidFill>
-                <a:latin typeface="Pretendard SemiBold"/>
-              </a:rPr>
-              <a:t>100</a:t>
-            </a:r>
-          </a:p>
-        </p:txBody>
-      </p:sp>
-      <p:sp>
-        <p:nvSpPr>
-          <p:cNvPr id="27" name="TextBox 26"/>
-          <p:cNvSpPr txBox="1"/>
-          <p:nvPr/>
-        </p:nvSpPr>
-        <p:spPr>
-          <a:xfrm>
-            <a:off x="6309360" y="3291840"/>
-            <a:ext cx="1828800" cy="457200"/>
-          </a:xfrm>
-          <a:prstGeom prst="rect">
-            <a:avLst/>
-          </a:prstGeom>
-          <a:noFill/>
-        </p:spPr>
-        <p:txBody>
-          <a:bodyPr wrap="square" lIns="45720" rIns="45720">
-            <a:spAutoFit/>
-          </a:bodyPr>
-          <a:lstStyle/>
-          <a:p>
-            <a:pPr algn="l">
-              <a:lnSpc>
-                <a:spcPct val="115000"/>
-              </a:lnSpc>
-            </a:pPr>
-            <a:r>
-              <a:rPr sz="1500" b="0">
-                <a:solidFill>
-                  <a:srgbClr val="181818"/>
-                </a:solidFill>
-                <a:latin typeface="Pretendard SemiBold"/>
-              </a:rPr>
-              <a:t>~60 분</a:t>
-            </a:r>
-          </a:p>
-        </p:txBody>
-      </p:sp>
-      <p:sp>
-        <p:nvSpPr>
-          <p:cNvPr id="28" name="TextBox 27"/>
-          <p:cNvSpPr txBox="1"/>
-          <p:nvPr/>
-        </p:nvSpPr>
-        <p:spPr>
-          <a:xfrm>
-            <a:off x="8229600" y="3291840"/>
-            <a:ext cx="1828800" cy="457200"/>
-          </a:xfrm>
-          <a:prstGeom prst="rect">
-            <a:avLst/>
-          </a:prstGeom>
-          <a:noFill/>
-        </p:spPr>
-        <p:txBody>
-          <a:bodyPr wrap="square" lIns="45720" rIns="45720">
-            <a:spAutoFit/>
-          </a:bodyPr>
-          <a:lstStyle/>
-          <a:p>
-            <a:pPr algn="l">
-              <a:lnSpc>
-                <a:spcPct val="115000"/>
-              </a:lnSpc>
-            </a:pPr>
-            <a:r>
-              <a:rPr sz="1500" b="0">
-                <a:solidFill>
-                  <a:srgbClr val="181818"/>
-                </a:solidFill>
-                <a:latin typeface="Pretendard SemiBold"/>
-              </a:rPr>
-              <a:t>117K</a:t>
-            </a:r>
-          </a:p>
-        </p:txBody>
-      </p:sp>
-      <p:sp>
-        <p:nvSpPr>
-          <p:cNvPr id="29" name="TextBox 28"/>
-          <p:cNvSpPr txBox="1"/>
-          <p:nvPr/>
-        </p:nvSpPr>
-        <p:spPr>
-          <a:xfrm>
-            <a:off x="10149840" y="3291840"/>
-            <a:ext cx="1828800" cy="457200"/>
-          </a:xfrm>
-          <a:prstGeom prst="rect">
-            <a:avLst/>
-          </a:prstGeom>
-          <a:noFill/>
-        </p:spPr>
-        <p:txBody>
-          <a:bodyPr wrap="square" lIns="45720" rIns="45720">
-            <a:spAutoFit/>
-          </a:bodyPr>
-          <a:lstStyle/>
-          <a:p>
-            <a:pPr algn="l">
-              <a:lnSpc>
-                <a:spcPct val="115000"/>
-              </a:lnSpc>
-            </a:pPr>
-            <a:r>
-              <a:rPr sz="1500" b="0">
-                <a:solidFill>
-                  <a:srgbClr val="181818"/>
-                </a:solidFill>
-                <a:latin typeface="Pretendard SemiBold"/>
-              </a:rPr>
-              <a:t>baseline 명확히 능가</a:t>
-            </a:r>
-          </a:p>
-        </p:txBody>
-      </p:sp>
-      <p:sp>
-        <p:nvSpPr>
-          <p:cNvPr id="30" name="Rounded Rectangle 29"/>
+              <a:t>~117K</a:t>
+            </a:r>
+          </a:p>
+        </p:txBody>
+      </p:sp>
+      <p:sp>
+        <p:nvSpPr>
+          <p:cNvPr id="21" name="Rounded Rectangle 20"/>
           <p:cNvSpPr/>
           <p:nvPr/>
         </p:nvSpPr>
         <p:spPr>
           <a:xfrm>
-            <a:off x="731520" y="4572000"/>
-            <a:ext cx="10698480" cy="822960"/>
+            <a:off x="640080" y="4754880"/>
+            <a:ext cx="11155680" cy="822960"/>
           </a:xfrm>
           <a:prstGeom prst="roundRect">
             <a:avLst/>
@@ -7534,14 +6873,14 @@
       </p:sp>
       <p:sp>
         <p:nvSpPr>
-          <p:cNvPr id="31" name="TextBox 30"/>
+          <p:cNvPr id="22" name="TextBox 21"/>
           <p:cNvSpPr txBox="1"/>
           <p:nvPr/>
         </p:nvSpPr>
         <p:spPr>
           <a:xfrm>
-            <a:off x="914400" y="4754880"/>
-            <a:ext cx="10332720" cy="457200"/>
+            <a:off x="822960" y="4937760"/>
+            <a:ext cx="10789920" cy="457200"/>
           </a:xfrm>
           <a:prstGeom prst="rect">
             <a:avLst/>
@@ -7560,13 +6899,13 @@
               </a:lnSpc>
             </a:pPr>
             <a:r>
-              <a:rPr sz="1800" b="0">
+              <a:rPr sz="1700" b="0">
                 <a:solidFill>
                   <a:srgbClr val="EA851B"/>
                 </a:solidFill>
                 <a:latin typeface="Pretendard ExtraBold"/>
               </a:rPr>
-              <a:t>★ 2조는 fast 권장 — 90분 세션에서 학습 완료</a:t>
+              <a:t>2조는 fast (~10분) 권장 — 90분 세션 내 학습 완료</a:t>
             </a:r>
           </a:p>
         </p:txBody>
@@ -7705,7 +7044,7 @@
                 </a:solidFill>
                 <a:latin typeface="Pretendard Medium"/>
               </a:rPr>
-              <a:t>W2 — DL 입문 · 2조 Intro</a:t>
+              <a:t>W2 · DL 입문 · 2조</a:t>
             </a:r>
           </a:p>
         </p:txBody>
@@ -7780,7 +7119,7 @@
               </a:spcAft>
             </a:pPr>
             <a:r>
-              <a:rPr sz="1700" b="0">
+              <a:rPr sz="1600" b="0">
                 <a:solidFill>
                   <a:srgbClr val="EA851B"/>
                 </a:solidFill>
@@ -7789,7 +7128,7 @@
               <a:t>•  </a:t>
             </a:r>
             <a:r>
-              <a:rPr sz="1700" b="0">
+              <a:rPr sz="1600" b="0">
                 <a:solidFill>
                   <a:srgbClr val="181818"/>
                 </a:solidFill>
@@ -7808,7 +7147,7 @@
               </a:spcAft>
             </a:pPr>
             <a:r>
-              <a:rPr sz="1700" b="0">
+              <a:rPr sz="1600" b="0">
                 <a:solidFill>
                   <a:srgbClr val="EA851B"/>
                 </a:solidFill>
@@ -7817,13 +7156,13 @@
               <a:t>•  </a:t>
             </a:r>
             <a:r>
-              <a:rPr sz="1700" b="0">
+              <a:rPr sz="1600" b="0">
                 <a:solidFill>
                   <a:srgbClr val="181818"/>
                 </a:solidFill>
                 <a:latin typeface="Consolas"/>
               </a:rPr>
-              <a:t>    optimizer.zero_grad()           ← 그래디언트 초기화</a:t>
+              <a:t>    optimizer.zero_grad()      # 그래디언트 초기화</a:t>
             </a:r>
           </a:p>
           <a:p>
@@ -7836,7 +7175,7 @@
               </a:spcAft>
             </a:pPr>
             <a:r>
-              <a:rPr sz="1700" b="0">
+              <a:rPr sz="1600" b="0">
                 <a:solidFill>
                   <a:srgbClr val="EA851B"/>
                 </a:solidFill>
@@ -7845,13 +7184,13 @@
               <a:t>•  </a:t>
             </a:r>
             <a:r>
-              <a:rPr sz="1700" b="0">
+              <a:rPr sz="1600" b="0">
                 <a:solidFill>
                   <a:srgbClr val="181818"/>
                 </a:solidFill>
                 <a:latin typeface="Consolas"/>
               </a:rPr>
-              <a:t>    pred = model(input)             ← forward pass</a:t>
+              <a:t>    pred = model(input)        # forward pass</a:t>
             </a:r>
           </a:p>
           <a:p>
@@ -7864,7 +7203,7 @@
               </a:spcAft>
             </a:pPr>
             <a:r>
-              <a:rPr sz="1700" b="0">
+              <a:rPr sz="1600" b="0">
                 <a:solidFill>
                   <a:srgbClr val="EA851B"/>
                 </a:solidFill>
@@ -7873,13 +7212,13 @@
               <a:t>•  </a:t>
             </a:r>
             <a:r>
-              <a:rPr sz="1700" b="0">
+              <a:rPr sz="1600" b="0">
                 <a:solidFill>
                   <a:srgbClr val="181818"/>
                 </a:solidFill>
                 <a:latin typeface="Consolas"/>
               </a:rPr>
-              <a:t>    loss = L1(pred, target)         ← 손실 계산</a:t>
+              <a:t>    loss = L1(pred, target)    # 손실 계산</a:t>
             </a:r>
           </a:p>
           <a:p>
@@ -7892,7 +7231,7 @@
               </a:spcAft>
             </a:pPr>
             <a:r>
-              <a:rPr sz="1700" b="0">
+              <a:rPr sz="1600" b="0">
                 <a:solidFill>
                   <a:srgbClr val="EA851B"/>
                 </a:solidFill>
@@ -7901,13 +7240,13 @@
               <a:t>•  </a:t>
             </a:r>
             <a:r>
-              <a:rPr sz="1700" b="0">
+              <a:rPr sz="1600" b="0">
                 <a:solidFill>
                   <a:srgbClr val="181818"/>
                 </a:solidFill>
                 <a:latin typeface="Consolas"/>
               </a:rPr>
-              <a:t>    loss.backward()                 ← gradient 계산</a:t>
+              <a:t>    loss.backward()            # gradient 계산</a:t>
             </a:r>
           </a:p>
           <a:p>
@@ -7920,7 +7259,7 @@
               </a:spcAft>
             </a:pPr>
             <a:r>
-              <a:rPr sz="1700" b="0">
+              <a:rPr sz="1600" b="0">
                 <a:solidFill>
                   <a:srgbClr val="EA851B"/>
                 </a:solidFill>
@@ -7929,13 +7268,13 @@
               <a:t>•  </a:t>
             </a:r>
             <a:r>
-              <a:rPr sz="1700" b="0">
+              <a:rPr sz="1600" b="0">
                 <a:solidFill>
                   <a:srgbClr val="181818"/>
                 </a:solidFill>
                 <a:latin typeface="Consolas"/>
               </a:rPr>
-              <a:t>    optimizer.step()                ← 가중치 갱신</a:t>
+              <a:t>    optimizer.step()           # 가중치 갱신</a:t>
             </a:r>
           </a:p>
         </p:txBody>
@@ -7968,13 +7307,13 @@
               </a:lnSpc>
             </a:pPr>
             <a:r>
-              <a:rPr sz="1600" b="0">
+              <a:rPr sz="1500" b="0">
                 <a:solidFill>
                   <a:srgbClr val="EA851B"/>
                 </a:solidFill>
-                <a:latin typeface="Pretendard ExtraBold"/>
-              </a:rPr>
-              <a:t>★ epoch 단위로 위 루프 반복. loss 가 줄어들면 학습 진행 중.</a:t>
+                <a:latin typeface="Pretendard SemiBold"/>
+              </a:rPr>
+              <a:t>epoch 단위로 위 루프를 반복. loss가 감소하면 학습 진행 중.</a:t>
             </a:r>
           </a:p>
         </p:txBody>
@@ -8113,7 +7452,7 @@
                 </a:solidFill>
                 <a:latin typeface="Pretendard Medium"/>
               </a:rPr>
-              <a:t>W2 — DL 입문 · 2조 Intro</a:t>
+              <a:t>W2 · DL 입문 · 2조</a:t>
             </a:r>
           </a:p>
         </p:txBody>
@@ -8165,8 +7504,8 @@
         </p:nvSpPr>
         <p:spPr>
           <a:xfrm>
-            <a:off x="731520" y="1371600"/>
-            <a:ext cx="10972800" cy="3657600"/>
+            <a:off x="640080" y="1463040"/>
+            <a:ext cx="11155680" cy="3657600"/>
           </a:xfrm>
           <a:prstGeom prst="rect">
             <a:avLst/>
@@ -8203,7 +7542,7 @@
                 </a:solidFill>
                 <a:latin typeface="Pretendard SemiBold"/>
               </a:rPr>
-              <a:t>학습 후 전체 BB 부피의 누락 슬라이스를 모델로 복원</a:t>
+              <a:t>학습 후 BB 부피의 누락 슬라이스를 모델로 복원</a:t>
             </a:r>
           </a:p>
           <a:p>
@@ -8231,7 +7570,7 @@
                 </a:solidFill>
                 <a:latin typeface="Pretendard SemiBold"/>
               </a:rPr>
-              <a:t>|Δφ|·SSIM 을 W1 baseline 결과와 직접 비교</a:t>
+              <a:t>|Δφ| · SSIM 을 W1 baseline과 직접 비교</a:t>
             </a:r>
           </a:p>
           <a:p>
@@ -8259,35 +7598,7 @@
                 </a:solidFill>
                 <a:latin typeface="Pretendard SemiBold"/>
               </a:rPr>
-              <a:t>3 도메인 (BB·CG·Parker) 에서도 평가</a:t>
-            </a:r>
-          </a:p>
-          <a:p>
-            <a:pPr>
-              <a:lnSpc>
-                <a:spcPct val="130000"/>
-              </a:lnSpc>
-              <a:spcAft>
-                <a:spcPts val="600"/>
-              </a:spcAft>
-            </a:pPr>
-            <a:r>
-              <a:rPr sz="1900" b="0">
-                <a:solidFill>
-                  <a:srgbClr val="EA851B"/>
-                </a:solidFill>
-                <a:latin typeface="Pretendard ExtraBold"/>
-              </a:rPr>
-              <a:t>•  </a:t>
-            </a:r>
-            <a:r>
-              <a:rPr sz="1900" b="0">
-                <a:solidFill>
-                  <a:srgbClr val="181818"/>
-                </a:solidFill>
-                <a:latin typeface="Pretendard SemiBold"/>
-              </a:rPr>
-              <a:t>"이 모델이 새로운 도메인에도 잘 작동하나?" = cross-domain</a:t>
+              <a:t>세 도메인(BB·CG·Parker) 평가 → 일반화 능력 검토</a:t>
             </a:r>
           </a:p>
         </p:txBody>
@@ -8344,7 +7655,7 @@
                 </a:solidFill>
                 <a:latin typeface="Pretendard Black"/>
               </a:rPr>
-              <a:t>[Try-it!] 박스</a:t>
+              <a:t>탐구 과제</a:t>
             </a:r>
           </a:p>
         </p:txBody>
@@ -8426,7 +7737,7 @@
                 </a:solidFill>
                 <a:latin typeface="Pretendard Medium"/>
               </a:rPr>
-              <a:t>W2 — DL 입문 · 2조 Intro</a:t>
+              <a:t>W2 · DL 입문 · 2조</a:t>
             </a:r>
           </a:p>
         </p:txBody>
@@ -8478,8 +7789,8 @@
         </p:nvSpPr>
         <p:spPr>
           <a:xfrm>
-            <a:off x="731520" y="1371600"/>
-            <a:ext cx="10972800" cy="3657600"/>
+            <a:off x="640080" y="1463040"/>
+            <a:ext cx="11155680" cy="3657600"/>
           </a:xfrm>
           <a:prstGeom prst="rect">
             <a:avLst/>
@@ -8501,7 +7812,7 @@
               </a:spcAft>
             </a:pPr>
             <a:r>
-              <a:rPr sz="1900" b="0">
+              <a:rPr sz="1800" b="0">
                 <a:solidFill>
                   <a:srgbClr val="EA851B"/>
                 </a:solidFill>
@@ -8510,13 +7821,13 @@
               <a:t>•  </a:t>
             </a:r>
             <a:r>
-              <a:rPr sz="1900" b="0">
+              <a:rPr sz="1800" b="0">
                 <a:solidFill>
                   <a:srgbClr val="181818"/>
                 </a:solidFill>
                 <a:latin typeface="Pretendard SemiBold"/>
               </a:rPr>
-              <a:t>① fast 학습 → 결과 확인 (필수)</a:t>
+              <a:t>필수 1 — fast / standard preset 가성비 비교</a:t>
             </a:r>
           </a:p>
           <a:p>
@@ -8529,7 +7840,7 @@
               </a:spcAft>
             </a:pPr>
             <a:r>
-              <a:rPr sz="1900" b="0">
+              <a:rPr sz="1800" b="0">
                 <a:solidFill>
                   <a:srgbClr val="EA851B"/>
                 </a:solidFill>
@@ -8538,13 +7849,13 @@
               <a:t>•  </a:t>
             </a:r>
             <a:r>
-              <a:rPr sz="1900" b="0">
+              <a:rPr sz="1800" b="0">
                 <a:solidFill>
                   <a:srgbClr val="181818"/>
                 </a:solidFill>
                 <a:latin typeface="Pretendard SemiBold"/>
               </a:rPr>
-              <a:t>② standard 학습으로 변경 → 시간/품질 차이 (선택)</a:t>
+              <a:t>필수 2 — 세 도메인 cross-domain 평가</a:t>
             </a:r>
           </a:p>
           <a:p>
@@ -8557,7 +7868,7 @@
               </a:spcAft>
             </a:pPr>
             <a:r>
-              <a:rPr sz="1900" b="0">
+              <a:rPr sz="1800" b="0">
                 <a:solidFill>
                   <a:srgbClr val="EA851B"/>
                 </a:solidFill>
@@ -8566,13 +7877,121 @@
               <a:t>•  </a:t>
             </a:r>
             <a:r>
-              <a:rPr sz="1900" b="0">
+              <a:rPr sz="1800" b="0">
                 <a:solidFill>
                   <a:srgbClr val="181818"/>
                 </a:solidFill>
                 <a:latin typeface="Pretendard SemiBold"/>
               </a:rPr>
-              <a:t>③ 다른 도메인 평가 — 어디서 일반화가 잘 되나</a:t>
+              <a:t>선택 3 — K=3 / 5 / 7 평가 안정성</a:t>
+            </a:r>
+          </a:p>
+          <a:p>
+            <a:pPr>
+              <a:lnSpc>
+                <a:spcPct val="130000"/>
+              </a:lnSpc>
+              <a:spcAft>
+                <a:spcPts val="600"/>
+              </a:spcAft>
+            </a:pPr>
+            <a:r>
+              <a:rPr sz="1800" b="0">
+                <a:solidFill>
+                  <a:srgbClr val="EA851B"/>
+                </a:solidFill>
+                <a:latin typeface="Pretendard ExtraBold"/>
+              </a:rPr>
+              <a:t>•  </a:t>
+            </a:r>
+            <a:r>
+              <a:rPr sz="1800" b="0">
+                <a:solidFill>
+                  <a:srgbClr val="181818"/>
+                </a:solidFill>
+                <a:latin typeface="Pretendard SemiBold"/>
+              </a:rPr>
+              <a:t>선택 4 — Learning rate 실험 (1e-4 / 5e-3)</a:t>
+            </a:r>
+          </a:p>
+        </p:txBody>
+      </p:sp>
+      <p:sp>
+        <p:nvSpPr>
+          <p:cNvPr id="7" name="Rounded Rectangle 6"/>
+          <p:cNvSpPr/>
+          <p:nvPr/>
+        </p:nvSpPr>
+        <p:spPr>
+          <a:xfrm>
+            <a:off x="640080" y="5486400"/>
+            <a:ext cx="11155680" cy="731520"/>
+          </a:xfrm>
+          <a:prstGeom prst="roundRect">
+            <a:avLst/>
+          </a:prstGeom>
+          <a:solidFill>
+            <a:srgbClr val="FAF5EE"/>
+          </a:solidFill>
+          <a:ln>
+            <a:noFill/>
+          </a:ln>
+        </p:spPr>
+        <p:style>
+          <a:lnRef idx="1">
+            <a:schemeClr val="accent1"/>
+          </a:lnRef>
+          <a:fillRef idx="3">
+            <a:schemeClr val="accent1"/>
+          </a:fillRef>
+          <a:effectRef idx="2">
+            <a:schemeClr val="accent1"/>
+          </a:effectRef>
+          <a:fontRef idx="minor">
+            <a:schemeClr val="lt1"/>
+          </a:fontRef>
+        </p:style>
+        <p:txBody>
+          <a:bodyPr rtlCol="0" anchor="ctr"/>
+          <a:lstStyle/>
+          <a:p/>
+        </p:txBody>
+      </p:sp>
+      <p:sp>
+        <p:nvSpPr>
+          <p:cNvPr id="8" name="TextBox 7"/>
+          <p:cNvSpPr txBox="1"/>
+          <p:nvPr/>
+        </p:nvSpPr>
+        <p:spPr>
+          <a:xfrm>
+            <a:off x="822960" y="5669280"/>
+            <a:ext cx="10789920" cy="457200"/>
+          </a:xfrm>
+          <a:prstGeom prst="rect">
+            <a:avLst/>
+          </a:prstGeom>
+          <a:noFill/>
+        </p:spPr>
+        <p:txBody>
+          <a:bodyPr wrap="square" lIns="45720" rIns="45720">
+            <a:spAutoFit/>
+          </a:bodyPr>
+          <a:lstStyle/>
+          <a:p>
+            <a:pPr algn="ctr">
+              <a:lnSpc>
+                <a:spcPct val="115000"/>
+              </a:lnSpc>
+            </a:pPr>
+            <a:r>
+              <a:rPr sz="1400" b="0">
+                <a:solidFill>
+                  <a:srgbClr val="181818"/>
+                </a:solidFill>
+                <a:latin typeface="Pretendard Medium"/>
+              </a:rPr>
+              <a:t>자세한 안내는 handout 참조</a:t>
             </a:r>
           </a:p>
         </p:txBody>

--- a/group2_intro/week2/slides/W2_group2.pptx
+++ b/group2_intro/week2/slides/W2_group2.pptx
@@ -3885,7 +3885,7 @@
               </a:spcAft>
             </a:pPr>
             <a:r>
-              <a:rPr sz="1800" b="0">
+              <a:rPr sz="1600" b="0">
                 <a:solidFill>
                   <a:srgbClr val="EA851B"/>
                 </a:solidFill>
@@ -3894,7 +3894,7 @@
               <a:t>•  </a:t>
             </a:r>
             <a:r>
-              <a:rPr sz="1800" b="0">
+              <a:rPr sz="1600" b="0">
                 <a:solidFill>
                   <a:srgbClr val="181818"/>
                 </a:solidFill>
@@ -3913,7 +3913,7 @@
               </a:spcAft>
             </a:pPr>
             <a:r>
-              <a:rPr sz="1800" b="0">
+              <a:rPr sz="1600" b="0">
                 <a:solidFill>
                   <a:srgbClr val="EA851B"/>
                 </a:solidFill>
@@ -3922,7 +3922,7 @@
               <a:t>•  </a:t>
             </a:r>
             <a:r>
-              <a:rPr sz="1800" b="0">
+              <a:rPr sz="1600" b="0">
                 <a:solidFill>
                   <a:srgbClr val="181818"/>
                 </a:solidFill>
@@ -3941,7 +3941,7 @@
               </a:spcAft>
             </a:pPr>
             <a:r>
-              <a:rPr sz="1800" b="0">
+              <a:rPr sz="1600" b="0">
                 <a:solidFill>
                   <a:srgbClr val="EA851B"/>
                 </a:solidFill>
@@ -3950,7 +3950,7 @@
               <a:t>•  </a:t>
             </a:r>
             <a:r>
-              <a:rPr sz="1800" b="0">
+              <a:rPr sz="1600" b="0">
                 <a:solidFill>
                   <a:srgbClr val="181818"/>
                 </a:solidFill>
@@ -4387,7 +4387,7 @@
               </a:spcAft>
             </a:pPr>
             <a:r>
-              <a:rPr sz="1900" b="0">
+              <a:rPr sz="1700" b="0">
                 <a:solidFill>
                   <a:srgbClr val="EA851B"/>
                 </a:solidFill>
@@ -4396,7 +4396,7 @@
               <a:t>•  </a:t>
             </a:r>
             <a:r>
-              <a:rPr sz="1900" b="0">
+              <a:rPr sz="1700" b="0">
                 <a:solidFill>
                   <a:srgbClr val="181818"/>
                 </a:solidFill>
@@ -4415,7 +4415,7 @@
               </a:spcAft>
             </a:pPr>
             <a:r>
-              <a:rPr sz="1900" b="0">
+              <a:rPr sz="1700" b="0">
                 <a:solidFill>
                   <a:srgbClr val="EA851B"/>
                 </a:solidFill>
@@ -4424,7 +4424,7 @@
               <a:t>•  </a:t>
             </a:r>
             <a:r>
-              <a:rPr sz="1900" b="0">
+              <a:rPr sz="1700" b="0">
                 <a:solidFill>
                   <a:srgbClr val="181818"/>
                 </a:solidFill>
@@ -4443,7 +4443,7 @@
               </a:spcAft>
             </a:pPr>
             <a:r>
-              <a:rPr sz="1900" b="0">
+              <a:rPr sz="1700" b="0">
                 <a:solidFill>
                   <a:srgbClr val="EA851B"/>
                 </a:solidFill>
@@ -4452,7 +4452,7 @@
               <a:t>•  </a:t>
             </a:r>
             <a:r>
-              <a:rPr sz="1900" b="0">
+              <a:rPr sz="1700" b="0">
                 <a:solidFill>
                   <a:srgbClr val="181818"/>
                 </a:solidFill>
@@ -4471,7 +4471,7 @@
               </a:spcAft>
             </a:pPr>
             <a:r>
-              <a:rPr sz="1900" b="0">
+              <a:rPr sz="1700" b="0">
                 <a:solidFill>
                   <a:srgbClr val="EA851B"/>
                 </a:solidFill>
@@ -4480,7 +4480,7 @@
               <a:t>•  </a:t>
             </a:r>
             <a:r>
-              <a:rPr sz="1900" b="0">
+              <a:rPr sz="1700" b="0">
                 <a:solidFill>
                   <a:srgbClr val="181818"/>
                 </a:solidFill>
@@ -4499,7 +4499,7 @@
               </a:spcAft>
             </a:pPr>
             <a:r>
-              <a:rPr sz="1900" b="0">
+              <a:rPr sz="1700" b="0">
                 <a:solidFill>
                   <a:srgbClr val="EA851B"/>
                 </a:solidFill>
@@ -4508,7 +4508,7 @@
               <a:t>•  </a:t>
             </a:r>
             <a:r>
-              <a:rPr sz="1900" b="0">
+              <a:rPr sz="1700" b="0">
                 <a:solidFill>
                   <a:srgbClr val="181818"/>
                 </a:solidFill>
@@ -5963,7 +5963,7 @@
               </a:spcAft>
             </a:pPr>
             <a:r>
-              <a:rPr sz="1800" b="0">
+              <a:rPr sz="1600" b="0">
                 <a:solidFill>
                   <a:srgbClr val="EA851B"/>
                 </a:solidFill>
@@ -5972,7 +5972,7 @@
               <a:t>•  </a:t>
             </a:r>
             <a:r>
-              <a:rPr sz="1800" b="0">
+              <a:rPr sz="1600" b="0">
                 <a:solidFill>
                   <a:srgbClr val="181818"/>
                 </a:solidFill>
@@ -5991,7 +5991,7 @@
               </a:spcAft>
             </a:pPr>
             <a:r>
-              <a:rPr sz="1800" b="0">
+              <a:rPr sz="1600" b="0">
                 <a:solidFill>
                   <a:srgbClr val="EA851B"/>
                 </a:solidFill>
@@ -6000,7 +6000,7 @@
               <a:t>•  </a:t>
             </a:r>
             <a:r>
-              <a:rPr sz="1800" b="0">
+              <a:rPr sz="1600" b="0">
                 <a:solidFill>
                   <a:srgbClr val="181818"/>
                 </a:solidFill>
@@ -6019,7 +6019,7 @@
               </a:spcAft>
             </a:pPr>
             <a:r>
-              <a:rPr sz="1800" b="0">
+              <a:rPr sz="1600" b="0">
                 <a:solidFill>
                   <a:srgbClr val="EA851B"/>
                 </a:solidFill>
@@ -6028,7 +6028,7 @@
               <a:t>•  </a:t>
             </a:r>
             <a:r>
-              <a:rPr sz="1800" b="0">
+              <a:rPr sz="1600" b="0">
                 <a:solidFill>
                   <a:srgbClr val="181818"/>
                 </a:solidFill>
@@ -6047,7 +6047,7 @@
               </a:spcAft>
             </a:pPr>
             <a:r>
-              <a:rPr sz="1800" b="0">
+              <a:rPr sz="1600" b="0">
                 <a:solidFill>
                   <a:srgbClr val="EA851B"/>
                 </a:solidFill>
@@ -6056,7 +6056,7 @@
               <a:t>•  </a:t>
             </a:r>
             <a:r>
-              <a:rPr sz="1800" b="0">
+              <a:rPr sz="1600" b="0">
                 <a:solidFill>
                   <a:srgbClr val="181818"/>
                 </a:solidFill>
@@ -7527,7 +7527,7 @@
               </a:spcAft>
             </a:pPr>
             <a:r>
-              <a:rPr sz="1900" b="0">
+              <a:rPr sz="1700" b="0">
                 <a:solidFill>
                   <a:srgbClr val="EA851B"/>
                 </a:solidFill>
@@ -7536,7 +7536,7 @@
               <a:t>•  </a:t>
             </a:r>
             <a:r>
-              <a:rPr sz="1900" b="0">
+              <a:rPr sz="1700" b="0">
                 <a:solidFill>
                   <a:srgbClr val="181818"/>
                 </a:solidFill>
@@ -7555,7 +7555,7 @@
               </a:spcAft>
             </a:pPr>
             <a:r>
-              <a:rPr sz="1900" b="0">
+              <a:rPr sz="1700" b="0">
                 <a:solidFill>
                   <a:srgbClr val="EA851B"/>
                 </a:solidFill>
@@ -7564,7 +7564,7 @@
               <a:t>•  </a:t>
             </a:r>
             <a:r>
-              <a:rPr sz="1900" b="0">
+              <a:rPr sz="1700" b="0">
                 <a:solidFill>
                   <a:srgbClr val="181818"/>
                 </a:solidFill>
@@ -7583,7 +7583,7 @@
               </a:spcAft>
             </a:pPr>
             <a:r>
-              <a:rPr sz="1900" b="0">
+              <a:rPr sz="1700" b="0">
                 <a:solidFill>
                   <a:srgbClr val="EA851B"/>
                 </a:solidFill>
@@ -7592,7 +7592,7 @@
               <a:t>•  </a:t>
             </a:r>
             <a:r>
-              <a:rPr sz="1900" b="0">
+              <a:rPr sz="1700" b="0">
                 <a:solidFill>
                   <a:srgbClr val="181818"/>
                 </a:solidFill>
@@ -7812,7 +7812,7 @@
               </a:spcAft>
             </a:pPr>
             <a:r>
-              <a:rPr sz="1800" b="0">
+              <a:rPr sz="1600" b="0">
                 <a:solidFill>
                   <a:srgbClr val="EA851B"/>
                 </a:solidFill>
@@ -7821,7 +7821,7 @@
               <a:t>•  </a:t>
             </a:r>
             <a:r>
-              <a:rPr sz="1800" b="0">
+              <a:rPr sz="1600" b="0">
                 <a:solidFill>
                   <a:srgbClr val="181818"/>
                 </a:solidFill>
@@ -7840,7 +7840,7 @@
               </a:spcAft>
             </a:pPr>
             <a:r>
-              <a:rPr sz="1800" b="0">
+              <a:rPr sz="1600" b="0">
                 <a:solidFill>
                   <a:srgbClr val="EA851B"/>
                 </a:solidFill>
@@ -7849,7 +7849,7 @@
               <a:t>•  </a:t>
             </a:r>
             <a:r>
-              <a:rPr sz="1800" b="0">
+              <a:rPr sz="1600" b="0">
                 <a:solidFill>
                   <a:srgbClr val="181818"/>
                 </a:solidFill>
@@ -7868,7 +7868,7 @@
               </a:spcAft>
             </a:pPr>
             <a:r>
-              <a:rPr sz="1800" b="0">
+              <a:rPr sz="1600" b="0">
                 <a:solidFill>
                   <a:srgbClr val="EA851B"/>
                 </a:solidFill>
@@ -7877,7 +7877,7 @@
               <a:t>•  </a:t>
             </a:r>
             <a:r>
-              <a:rPr sz="1800" b="0">
+              <a:rPr sz="1600" b="0">
                 <a:solidFill>
                   <a:srgbClr val="181818"/>
                 </a:solidFill>
@@ -7896,7 +7896,7 @@
               </a:spcAft>
             </a:pPr>
             <a:r>
-              <a:rPr sz="1800" b="0">
+              <a:rPr sz="1600" b="0">
                 <a:solidFill>
                   <a:srgbClr val="EA851B"/>
                 </a:solidFill>
@@ -7905,7 +7905,7 @@
               <a:t>•  </a:t>
             </a:r>
             <a:r>
-              <a:rPr sz="1800" b="0">
+              <a:rPr sz="1600" b="0">
                 <a:solidFill>
                   <a:srgbClr val="181818"/>
                 </a:solidFill>
